--- a/slides/Presentation_Datagong_Ecommerce_LimalebaGermain.pptx
+++ b/slides/Presentation_Datagong_Ecommerce_LimalebaGermain.pptx
@@ -14181,7 +14181,73 @@
                 <a:ea typeface="Calibri" pitchFamily="34" charset="-122"/>
                 <a:cs typeface="Calibri" pitchFamily="34" charset="-120"/>
               </a:rPr>
-              <a:t>Analysées colonne par colonne (%), documentées sans suppression.</a:t>
+              <a:t>Analysées colonne par </a:t>
+            </a:r>
+            <a:r>
+              <a:rPr lang="en-US" sz="1200" dirty="0" err="1">
+                <a:solidFill>
+                  <a:srgbClr val="6B6266"/>
+                </a:solidFill>
+                <a:latin typeface="Calibri" pitchFamily="34" charset="0"/>
+                <a:ea typeface="Calibri" pitchFamily="34" charset="-122"/>
+                <a:cs typeface="Calibri" pitchFamily="34" charset="-120"/>
+              </a:rPr>
+              <a:t>colonne</a:t>
+            </a:r>
+            <a:r>
+              <a:rPr lang="en-US" sz="1200" dirty="0">
+                <a:solidFill>
+                  <a:srgbClr val="6B6266"/>
+                </a:solidFill>
+                <a:latin typeface="Calibri" pitchFamily="34" charset="0"/>
+                <a:ea typeface="Calibri" pitchFamily="34" charset="-122"/>
+                <a:cs typeface="Calibri" pitchFamily="34" charset="-120"/>
+              </a:rPr>
+              <a:t> (</a:t>
+            </a:r>
+            <a:r>
+              <a:rPr lang="en-US" sz="1200" dirty="0" err="1">
+                <a:solidFill>
+                  <a:srgbClr val="6B6266"/>
+                </a:solidFill>
+                <a:latin typeface="Calibri" pitchFamily="34" charset="0"/>
+                <a:ea typeface="Calibri" pitchFamily="34" charset="-122"/>
+                <a:cs typeface="Calibri" pitchFamily="34" charset="-120"/>
+              </a:rPr>
+              <a:t>delivered_at</a:t>
+            </a:r>
+            <a:r>
+              <a:rPr lang="en-US" sz="1200" dirty="0">
+                <a:solidFill>
+                  <a:srgbClr val="6B6266"/>
+                </a:solidFill>
+                <a:latin typeface="Calibri" pitchFamily="34" charset="0"/>
+                <a:ea typeface="Calibri" pitchFamily="34" charset="-122"/>
+                <a:cs typeface="Calibri" pitchFamily="34" charset="-120"/>
+              </a:rPr>
+              <a:t> 62,12%, </a:t>
+            </a:r>
+            <a:r>
+              <a:rPr lang="en-US" sz="1200" dirty="0" err="1">
+                <a:solidFill>
+                  <a:srgbClr val="6B6266"/>
+                </a:solidFill>
+                <a:latin typeface="Calibri" pitchFamily="34" charset="0"/>
+                <a:ea typeface="Calibri" pitchFamily="34" charset="-122"/>
+                <a:cs typeface="Calibri" pitchFamily="34" charset="-120"/>
+              </a:rPr>
+              <a:t>shipped_at</a:t>
+            </a:r>
+            <a:r>
+              <a:rPr lang="en-US" sz="1200" dirty="0">
+                <a:solidFill>
+                  <a:srgbClr val="6B6266"/>
+                </a:solidFill>
+                <a:latin typeface="Calibri" pitchFamily="34" charset="0"/>
+                <a:ea typeface="Calibri" pitchFamily="34" charset="-122"/>
+                <a:cs typeface="Calibri" pitchFamily="34" charset="-120"/>
+              </a:rPr>
+              <a:t> 32,52%, brand 0,12%), documentées sans suppression.</a:t>
             </a:r>
             <a:endParaRPr lang="en-US" sz="1200" dirty="0"/>
           </a:p>
@@ -14321,7 +14387,40 @@
                 <a:ea typeface="Calibri" pitchFamily="34" charset="-122"/>
                 <a:cs typeface="Calibri" pitchFamily="34" charset="-120"/>
               </a:rPr>
-              <a:t>Recherche de lignes entièrement dupliquées sur le jeu de données.</a:t>
+              <a:t>Recherche de lignes entièrement dupliquées sur le jeu de données ; pas de </a:t>
+            </a:r>
+            <a:r>
+              <a:rPr lang="en-US" sz="1200" dirty="0" err="1">
+                <a:solidFill>
+                  <a:srgbClr val="6B6266"/>
+                </a:solidFill>
+                <a:latin typeface="Calibri" pitchFamily="34" charset="0"/>
+                <a:ea typeface="Calibri" pitchFamily="34" charset="-122"/>
+                <a:cs typeface="Calibri" pitchFamily="34" charset="-120"/>
+              </a:rPr>
+              <a:t>doublons</a:t>
+            </a:r>
+            <a:r>
+              <a:rPr lang="en-US" sz="1200" dirty="0">
+                <a:solidFill>
+                  <a:srgbClr val="6B6266"/>
+                </a:solidFill>
+                <a:latin typeface="Calibri" pitchFamily="34" charset="0"/>
+                <a:ea typeface="Calibri" pitchFamily="34" charset="-122"/>
+                <a:cs typeface="Calibri" pitchFamily="34" charset="-120"/>
+              </a:rPr>
+              <a:t> </a:t>
+            </a:r>
+            <a:r>
+              <a:rPr lang="en-US" sz="1200" dirty="0" err="1">
+                <a:solidFill>
+                  <a:srgbClr val="6B6266"/>
+                </a:solidFill>
+                <a:latin typeface="Calibri" pitchFamily="34" charset="0"/>
+                <a:ea typeface="Calibri" pitchFamily="34" charset="-122"/>
+                <a:cs typeface="Calibri" pitchFamily="34" charset="-120"/>
+              </a:rPr>
+              <a:t>trouvés</a:t>
             </a:r>
             <a:endParaRPr lang="en-US" sz="1200" dirty="0"/>
           </a:p>
@@ -14601,7 +14700,73 @@
                 <a:ea typeface="Calibri" pitchFamily="34" charset="-122"/>
                 <a:cs typeface="Calibri" pitchFamily="34" charset="-120"/>
               </a:rPr>
-              <a:t>Tests croisés : article créé après commande / expédition / livraison ; livraison avant expédition.</a:t>
+              <a:t>Tests croisés : article créé après </a:t>
+            </a:r>
+            <a:r>
+              <a:rPr lang="en-US" sz="1200" dirty="0" err="1">
+                <a:solidFill>
+                  <a:srgbClr val="6B6266"/>
+                </a:solidFill>
+                <a:latin typeface="Calibri" pitchFamily="34" charset="0"/>
+                <a:ea typeface="Calibri" pitchFamily="34" charset="-122"/>
+                <a:cs typeface="Calibri" pitchFamily="34" charset="-120"/>
+              </a:rPr>
+              <a:t>commande</a:t>
+            </a:r>
+            <a:r>
+              <a:rPr lang="en-US" sz="1200" dirty="0">
+                <a:solidFill>
+                  <a:srgbClr val="6B6266"/>
+                </a:solidFill>
+                <a:latin typeface="Calibri" pitchFamily="34" charset="0"/>
+                <a:ea typeface="Calibri" pitchFamily="34" charset="-122"/>
+                <a:cs typeface="Calibri" pitchFamily="34" charset="-120"/>
+              </a:rPr>
+              <a:t>(775) / </a:t>
+            </a:r>
+            <a:r>
+              <a:rPr lang="en-US" sz="1200" dirty="0" err="1">
+                <a:solidFill>
+                  <a:srgbClr val="6B6266"/>
+                </a:solidFill>
+                <a:latin typeface="Calibri" pitchFamily="34" charset="0"/>
+                <a:ea typeface="Calibri" pitchFamily="34" charset="-122"/>
+                <a:cs typeface="Calibri" pitchFamily="34" charset="-120"/>
+              </a:rPr>
+              <a:t>expédition</a:t>
+            </a:r>
+            <a:r>
+              <a:rPr lang="en-US" sz="1200" dirty="0">
+                <a:solidFill>
+                  <a:srgbClr val="6B6266"/>
+                </a:solidFill>
+                <a:latin typeface="Calibri" pitchFamily="34" charset="0"/>
+                <a:ea typeface="Calibri" pitchFamily="34" charset="-122"/>
+                <a:cs typeface="Calibri" pitchFamily="34" charset="-120"/>
+              </a:rPr>
+              <a:t>(375) / livraison(63) ; livraison avant </a:t>
+            </a:r>
+            <a:r>
+              <a:rPr lang="en-US" sz="1200" dirty="0" err="1">
+                <a:solidFill>
+                  <a:srgbClr val="6B6266"/>
+                </a:solidFill>
+                <a:latin typeface="Calibri" pitchFamily="34" charset="0"/>
+                <a:ea typeface="Calibri" pitchFamily="34" charset="-122"/>
+                <a:cs typeface="Calibri" pitchFamily="34" charset="-120"/>
+              </a:rPr>
+              <a:t>expédition</a:t>
+            </a:r>
+            <a:r>
+              <a:rPr lang="en-US" sz="1200" dirty="0">
+                <a:solidFill>
+                  <a:srgbClr val="6B6266"/>
+                </a:solidFill>
+                <a:latin typeface="Calibri" pitchFamily="34" charset="0"/>
+                <a:ea typeface="Calibri" pitchFamily="34" charset="-122"/>
+                <a:cs typeface="Calibri" pitchFamily="34" charset="-120"/>
+              </a:rPr>
+              <a:t>(0).</a:t>
             </a:r>
             <a:endParaRPr lang="en-US" sz="1200" dirty="0"/>
           </a:p>
